--- a/dt100/manager-arch-vision-b6.pptx
+++ b/dt100/manager-arch-vision-b6.pptx
@@ -11284,8 +11284,8 @@
         </p:blipFill>
         <p:spPr>
           <a:xfrm>
-            <a:off x="502920" y="1234440"/>
-            <a:ext cx="10972800" cy="6161484"/>
+            <a:off x="411480" y="1143000"/>
+            <a:ext cx="11155680" cy="6264176"/>
           </a:xfrm>
           <a:prstGeom prst="rect">
             <a:avLst/>

--- a/dt100/manager-arch-vision-b6.pptx
+++ b/dt100/manager-arch-vision-b6.pptx
@@ -19,7 +19,6 @@
     <p:sldId id="265" r:id="rId14"/>
     <p:sldId id="266" r:id="rId15"/>
     <p:sldId id="267" r:id="rId16"/>
-    <p:sldId id="268" r:id="rId17"/>
   </p:sldIdLst>
   <p:sldSz cx="9144000" cy="5143500" type="screen16x9"/>
   <p:notesSz cx="5143500" cy="9144000"/>
@@ -2388,178 +2387,6 @@
             <a:fld id="{00000000-1234-1234-1234-123412341234}" type="slidenum">
               <a:rPr lang="en-US"/>
               <a:t>12</a:t>
-            </a:fld>
-            <a:endParaRPr/>
-          </a:p>
-        </p:txBody>
-      </p:sp>
-    </p:spTree>
-  </p:cSld>
-  <p:clrMapOvr>
-    <a:masterClrMapping/>
-  </p:clrMapOvr>
-</p:notes>
-</file>
-
-<file path=ppt/notesSlides/notesSlide13.xml><?xml version="1.0" encoding="utf-8"?>
-<p:notes xmlns:a="http://schemas.openxmlformats.org/drawingml/2006/main" xmlns:r="http://schemas.openxmlformats.org/officeDocument/2006/relationships" xmlns:p="http://schemas.openxmlformats.org/presentationml/2006/main" showMasterSp="0" showMasterPhAnim="0">
-  <p:cSld>
-    <p:spTree>
-      <p:nvGrpSpPr>
-        <p:cNvPr id="1" name="Shape 158"/>
-        <p:cNvGrpSpPr/>
-        <p:nvPr/>
-      </p:nvGrpSpPr>
-      <p:grpSpPr>
-        <a:xfrm>
-          <a:off x="0" y="0"/>
-          <a:ext cx="0" cy="0"/>
-          <a:chOff x="0" y="0"/>
-          <a:chExt cx="0" cy="0"/>
-        </a:xfrm>
-      </p:grpSpPr>
-      <p:sp>
-        <p:nvSpPr>
-          <p:cNvPr id="159" name="Google Shape;159;g38b39bbdc2a_0_79:notes"/>
-          <p:cNvSpPr>
-            <a:spLocks noGrp="1" noRot="1" noChangeAspect="1"/>
-          </p:cNvSpPr>
-          <p:nvPr>
-            <p:ph type="sldImg" idx="2"/>
-          </p:nvPr>
-        </p:nvSpPr>
-        <p:spPr>
-          <a:xfrm>
-            <a:off x="685800" y="1143000"/>
-            <a:ext cx="5486400" cy="3086100"/>
-          </a:xfrm>
-          <a:custGeom>
-            <a:avLst/>
-            <a:gdLst/>
-            <a:ahLst/>
-            <a:cxnLst/>
-            <a:rect l="l" t="t" r="r" b="b"/>
-            <a:pathLst>
-              <a:path w="120000" h="120000" extrusionOk="0">
-                <a:moveTo>
-                  <a:pt x="0" y="0"/>
-                </a:moveTo>
-                <a:lnTo>
-                  <a:pt x="120000" y="0"/>
-                </a:lnTo>
-                <a:lnTo>
-                  <a:pt x="120000" y="120000"/>
-                </a:lnTo>
-                <a:lnTo>
-                  <a:pt x="0" y="120000"/>
-                </a:lnTo>
-                <a:close/>
-              </a:path>
-            </a:pathLst>
-          </a:custGeom>
-          <a:noFill/>
-          <a:ln w="12700" cap="flat" cmpd="sng">
-            <a:solidFill>
-              <a:srgbClr val="000000"/>
-            </a:solidFill>
-            <a:prstDash val="solid"/>
-            <a:round/>
-            <a:headEnd type="none" w="sm" len="sm"/>
-            <a:tailEnd type="none" w="sm" len="sm"/>
-          </a:ln>
-        </p:spPr>
-      </p:sp>
-      <p:sp>
-        <p:nvSpPr>
-          <p:cNvPr id="160" name="Google Shape;160;g38b39bbdc2a_0_79:notes"/>
-          <p:cNvSpPr txBox="1">
-            <a:spLocks noGrp="1"/>
-          </p:cNvSpPr>
-          <p:nvPr>
-            <p:ph type="body" idx="1"/>
-          </p:nvPr>
-        </p:nvSpPr>
-        <p:spPr>
-          <a:xfrm>
-            <a:off x="685800" y="4400550"/>
-            <a:ext cx="5486400" cy="3600600"/>
-          </a:xfrm>
-          <a:prstGeom prst="rect">
-            <a:avLst/>
-          </a:prstGeom>
-          <a:noFill/>
-          <a:ln>
-            <a:noFill/>
-          </a:ln>
-        </p:spPr>
-        <p:txBody>
-          <a:bodyPr spcFirstLastPara="1" wrap="square" lIns="91425" tIns="45700" rIns="91425" bIns="45700" anchor="t" anchorCtr="0">
-            <a:noAutofit/>
-          </a:bodyPr>
-          <a:lstStyle/>
-          <a:p>
-            <a:pPr marL="0" lvl="0" indent="0" algn="l" rtl="0">
-              <a:lnSpc>
-                <a:spcPct val="100000"/>
-              </a:lnSpc>
-              <a:spcBef>
-                <a:spcPts val="0"/>
-              </a:spcBef>
-              <a:spcAft>
-                <a:spcPts val="0"/>
-              </a:spcAft>
-              <a:buSzPts val="1400"/>
-              <a:buNone/>
-            </a:pPr>
-            <a:endParaRPr/>
-          </a:p>
-        </p:txBody>
-      </p:sp>
-      <p:sp>
-        <p:nvSpPr>
-          <p:cNvPr id="161" name="Google Shape;161;g38b39bbdc2a_0_79:notes"/>
-          <p:cNvSpPr txBox="1">
-            <a:spLocks noGrp="1"/>
-          </p:cNvSpPr>
-          <p:nvPr>
-            <p:ph type="sldNum" idx="12"/>
-          </p:nvPr>
-        </p:nvSpPr>
-        <p:spPr>
-          <a:xfrm>
-            <a:off x="3884613" y="8685213"/>
-            <a:ext cx="2971800" cy="458700"/>
-          </a:xfrm>
-          <a:prstGeom prst="rect">
-            <a:avLst/>
-          </a:prstGeom>
-          <a:noFill/>
-          <a:ln>
-            <a:noFill/>
-          </a:ln>
-        </p:spPr>
-        <p:txBody>
-          <a:bodyPr spcFirstLastPara="1" wrap="square" lIns="91425" tIns="45700" rIns="91425" bIns="45700" anchor="b" anchorCtr="0">
-            <a:noAutofit/>
-          </a:bodyPr>
-          <a:lstStyle/>
-          <a:p>
-            <a:pPr marL="0" lvl="0" indent="0" algn="r" rtl="0">
-              <a:lnSpc>
-                <a:spcPct val="100000"/>
-              </a:lnSpc>
-              <a:spcBef>
-                <a:spcPts val="0"/>
-              </a:spcBef>
-              <a:spcAft>
-                <a:spcPts val="0"/>
-              </a:spcAft>
-              <a:buSzPts val="1400"/>
-              <a:buNone/>
-            </a:pPr>
-            <a:fld id="{00000000-1234-1234-1234-123412341234}" type="slidenum">
-              <a:rPr lang="en-US"/>
-              <a:t>13</a:t>
             </a:fld>
             <a:endParaRPr/>
           </a:p>
@@ -5757,15 +5584,15 @@
           </a:bodyPr>
           <a:lstStyle/>
           <a:p>
-            <a:pPr marL="0" marR="0" lvl="0" indent="0" algn="ctr" rtl="0">
-              <a:lnSpc>
-                <a:spcPct val="100000"/>
-              </a:lnSpc>
-              <a:spcBef>
-                <a:spcPts val="0"/>
-              </a:spcBef>
-              <a:spcAft>
-                <a:spcPts val="0"/>
+            <a:pPr marL="0" marR="0" indent="0" algn="ctr" rtl="0">
+              <a:lnSpc>
+                <a:spcPct val="100000"/>
+              </a:lnSpc>
+              <a:spcBef>
+                <a:spcPts val="0"/>
+              </a:spcBef>
+              <a:spcAft>
+                <a:spcPts val="200"/>
               </a:spcAft>
               <a:buClr>
                 <a:srgbClr val="FFE19E"/>
@@ -5775,56 +5602,13 @@
               <a:buNone/>
             </a:pPr>
             <a:r>
-              <a:rPr lang="en-US" sz="2200" b="1" i="0" u="none" strike="noStrike" cap="none">
+              <a:rPr sz="1900">
                 <a:solidFill>
                   <a:srgbClr val="FFE19E"/>
                 </a:solidFill>
                 <a:latin typeface="Calibri"/>
-                <a:ea typeface="Calibri"/>
-                <a:cs typeface="Calibri"/>
-                <a:sym typeface="Calibri"/>
               </a:rPr>
               <a:t>Walk: machine → owners → pipeline → defer → Cx</a:t>
-            </a:r>
-            <a:endParaRPr sz="2200" b="0" i="0" u="none" strike="noStrike" cap="none">
-              <a:solidFill>
-                <a:schemeClr val="dk1"/>
-              </a:solidFill>
-              <a:latin typeface="Calibri"/>
-              <a:ea typeface="Calibri"/>
-              <a:cs typeface="Calibri"/>
-              <a:sym typeface="Calibri"/>
-            </a:endParaRPr>
-          </a:p>
-          <a:p>
-            <a:pPr marL="0" marR="0" lvl="0" indent="0" algn="ctr" rtl="0">
-              <a:lnSpc>
-                <a:spcPct val="100000"/>
-              </a:lnSpc>
-              <a:spcBef>
-                <a:spcPts val="0"/>
-              </a:spcBef>
-              <a:spcAft>
-                <a:spcPts val="0"/>
-              </a:spcAft>
-              <a:buClr>
-                <a:srgbClr val="FFE19E"/>
-              </a:buClr>
-              <a:buSzPts val="2200"/>
-              <a:buFont typeface="Calibri"/>
-              <a:buNone/>
-            </a:pPr>
-            <a:r>
-              <a:rPr lang="en-US" sz="2200" b="1" i="0" u="none" strike="noStrike" cap="none">
-                <a:solidFill>
-                  <a:srgbClr val="FFE19E"/>
-                </a:solidFill>
-                <a:latin typeface="Calibri"/>
-                <a:ea typeface="Calibri"/>
-                <a:cs typeface="Calibri"/>
-                <a:sym typeface="Calibri"/>
-              </a:rPr>
-              <a:t/>
             </a:r>
             <a:endParaRPr sz="2200" b="0" i="0" u="none" strike="noStrike" cap="none">
               <a:solidFill>
@@ -6194,7 +5978,7 @@
               <a:buNone/>
             </a:pPr>
             <a:r>
-              <a:rPr lang="en-US" sz="3000" b="0" i="0" u="none" strike="noStrike" cap="none">
+              <a:rPr lang="en-US" sz="2600" b="0" i="0" u="none" strike="noStrike" cap="none">
                 <a:solidFill>
                   <a:srgbClr val="051830"/>
                 </a:solidFill>
@@ -6540,10 +6324,11 @@
               <a:buChar char="●"/>
             </a:pPr>
             <a:r>
-              <a:rPr>
+              <a:rPr sz="1300">
                 <a:solidFill>
                   <a:srgbClr val="333333"/>
                 </a:solidFill>
+                <a:latin typeface="Arial"/>
               </a:rPr>
               <a:t>Beat 5 · ~1 min</a:t>
             </a:r>
@@ -6563,10 +6348,11 @@
           <a:p>
             <a:pPr/>
             <a:r>
-              <a:rPr>
+              <a:rPr sz="1300">
                 <a:solidFill>
                   <a:srgbClr val="333333"/>
                 </a:solidFill>
+                <a:latin typeface="Arial"/>
               </a:rPr>
               <a:t>Rupa SDK/SAI/datapath layout — related, different plan; weekly sync, not on Thu</a:t>
             </a:r>
@@ -6574,10 +6360,11 @@
           <a:p>
             <a:pPr/>
             <a:r>
-              <a:rPr>
+              <a:rPr sz="1300">
                 <a:solidFill>
                   <a:srgbClr val="333333"/>
                 </a:solidFill>
+                <a:latin typeface="Arial"/>
               </a:rPr>
               <a:t>OCP ESUN: coordinate with Rupa before vendor calls; company position through Sponsor</a:t>
             </a:r>
@@ -6585,10 +6372,11 @@
           <a:p>
             <a:pPr/>
             <a:r>
-              <a:rPr>
+              <a:rPr sz="1300">
                 <a:solidFill>
                   <a:srgbClr val="333333"/>
                 </a:solidFill>
+                <a:latin typeface="Arial"/>
               </a:rPr>
               <a:t>Prabu execution mesh / bs-2 — round 2 unless you redirect</a:t>
             </a:r>
@@ -6671,7 +6459,7 @@
               <a:buNone/>
             </a:pPr>
             <a:r>
-              <a:rPr lang="en-US" sz="3000" b="0" i="0" u="none" strike="noStrike" cap="none">
+              <a:rPr lang="en-US" sz="2600" b="0" i="0" u="none" strike="noStrike" cap="none">
                 <a:solidFill>
                   <a:srgbClr val="051830"/>
                 </a:solidFill>
@@ -7017,10 +6805,11 @@
               <a:buChar char="●"/>
             </a:pPr>
             <a:r>
-              <a:rPr>
+              <a:rPr sz="1300">
                 <a:solidFill>
                   <a:srgbClr val="333333"/>
                 </a:solidFill>
+                <a:latin typeface="Arial"/>
               </a:rPr>
               <a:t>Beat 6</a:t>
             </a:r>
@@ -7040,10 +6829,11 @@
           <a:p>
             <a:pPr/>
             <a:r>
-              <a:rPr>
+              <a:rPr sz="1300">
                 <a:solidFill>
                   <a:srgbClr val="333333"/>
                 </a:solidFill>
+                <a:latin typeface="Arial"/>
               </a:rPr>
               <a:t>Decision: validation gate definitions (C-model / emu / pre-tapeout) v0</a:t>
             </a:r>
@@ -7051,10 +6841,11 @@
           <a:p>
             <a:pPr/>
             <a:r>
-              <a:rPr>
+              <a:rPr sz="1300">
                 <a:solidFill>
                   <a:srgbClr val="333333"/>
                 </a:solidFill>
+                <a:latin typeface="Arial"/>
               </a:rPr>
               <a:t>Decision: QoS RM HWv1 scope sign-off with HW datapath DRI</a:t>
             </a:r>
@@ -7062,10 +6853,11 @@
           <a:p>
             <a:pPr/>
             <a:r>
-              <a:rPr>
+              <a:rPr sz="1300">
                 <a:solidFill>
                   <a:srgbClr val="333333"/>
                 </a:solidFill>
+                <a:latin typeface="Arial"/>
               </a:rPr>
               <a:t>Open: access to models, lab, repos · Actions: cadence with Shafi, Tippanna, Rupa, Prasun</a:t>
             </a:r>
@@ -7073,10 +6865,11 @@
           <a:p>
             <a:pPr/>
             <a:r>
-              <a:rPr>
+              <a:rPr sz="1300">
                 <a:solidFill>
                   <a:srgbClr val="333333"/>
                 </a:solidFill>
+                <a:latin typeface="Arial"/>
               </a:rPr>
               <a:t>If asked who must be in the room — offer here (not on A3)</a:t>
             </a:r>
@@ -7159,7 +6952,7 @@
               <a:buNone/>
             </a:pPr>
             <a:r>
-              <a:rPr lang="en-US" sz="3000" b="0" i="0" u="none" strike="noStrike" cap="none">
+              <a:rPr lang="en-US" sz="2600" b="0" i="0" u="none" strike="noStrike" cap="none">
                 <a:solidFill>
                   <a:srgbClr val="051830"/>
                 </a:solidFill>
@@ -7505,10 +7298,11 @@
               <a:buChar char="●"/>
             </a:pPr>
             <a:r>
-              <a:rPr>
+              <a:rPr sz="1300">
                 <a:solidFill>
                   <a:srgbClr val="333333"/>
                 </a:solidFill>
+                <a:latin typeface="Arial"/>
               </a:rPr>
               <a:t>Beat 5–6</a:t>
             </a:r>
@@ -7528,10 +7322,11 @@
           <a:p>
             <a:pPr/>
             <a:r>
-              <a:rPr>
+              <a:rPr sz="1300">
                 <a:solidFill>
                   <a:srgbClr val="333333"/>
                 </a:solidFill>
+                <a:latin typeface="Arial"/>
               </a:rPr>
               <a:t>Not C40 / full HW digest · Not SDK program ownership day one</a:t>
             </a:r>
@@ -7539,10 +7334,11 @@
           <a:p>
             <a:pPr/>
             <a:r>
-              <a:rPr>
+              <a:rPr sz="1300">
                 <a:solidFill>
                   <a:srgbClr val="333333"/>
                 </a:solidFill>
+                <a:latin typeface="Arial"/>
               </a:rPr>
               <a:t>Not AI/token policy · Not a second 50-pager — walkable backup only</a:t>
             </a:r>
@@ -7550,818 +7346,14 @@
           <a:p>
             <a:pPr/>
             <a:r>
-              <a:rPr>
+              <a:rPr sz="1300">
                 <a:solidFill>
                   <a:srgbClr val="333333"/>
                 </a:solidFill>
+                <a:latin typeface="Arial"/>
               </a:rPr>
               <a:t>Whiteboard backup: assets/dt100-whiteboards.md (only if asked)</a:t>
             </a:r>
-          </a:p>
-        </p:txBody>
-      </p:sp>
-    </p:spTree>
-  </p:cSld>
-  <p:clrMapOvr>
-    <a:masterClrMapping/>
-  </p:clrMapOvr>
-</p:sld>
-</file>
-
-<file path=ppt/slides/slide13.xml><?xml version="1.0" encoding="utf-8"?>
-<p:sld xmlns:a="http://schemas.openxmlformats.org/drawingml/2006/main" xmlns:r="http://schemas.openxmlformats.org/officeDocument/2006/relationships" xmlns:p="http://schemas.openxmlformats.org/presentationml/2006/main">
-  <p:cSld>
-    <p:bg>
-      <p:bgPr>
-        <a:solidFill>
-          <a:srgbClr val="FFFFFF"/>
-        </a:solidFill>
-        <a:effectLst/>
-      </p:bgPr>
-    </p:bg>
-    <p:spTree>
-      <p:nvGrpSpPr>
-        <p:cNvPr id="1" name="Shape 162"/>
-        <p:cNvGrpSpPr/>
-        <p:nvPr/>
-      </p:nvGrpSpPr>
-      <p:grpSpPr>
-        <a:xfrm>
-          <a:off x="0" y="0"/>
-          <a:ext cx="0" cy="0"/>
-          <a:chOff x="0" y="0"/>
-          <a:chExt cx="0" cy="0"/>
-        </a:xfrm>
-      </p:grpSpPr>
-      <p:sp>
-        <p:nvSpPr>
-          <p:cNvPr id="163" name="Google Shape;163;g38b39bbdc2a_0_79"/>
-          <p:cNvSpPr/>
-          <p:nvPr/>
-        </p:nvSpPr>
-        <p:spPr>
-          <a:xfrm>
-            <a:off x="411480" y="201168"/>
-            <a:ext cx="8321100" cy="594300"/>
-          </a:xfrm>
-          <a:prstGeom prst="rect">
-            <a:avLst/>
-          </a:prstGeom>
-          <a:noFill/>
-          <a:ln>
-            <a:noFill/>
-          </a:ln>
-        </p:spPr>
-        <p:txBody>
-          <a:bodyPr spcFirstLastPara="1" wrap="square" lIns="91425" tIns="45700" rIns="91425" bIns="45700" anchor="t" anchorCtr="0">
-            <a:noAutofit/>
-          </a:bodyPr>
-          <a:lstStyle/>
-          <a:p>
-            <a:pPr marL="0" marR="0" lvl="0" indent="0" algn="l" rtl="0">
-              <a:lnSpc>
-                <a:spcPct val="100000"/>
-              </a:lnSpc>
-              <a:spcBef>
-                <a:spcPts val="0"/>
-              </a:spcBef>
-              <a:spcAft>
-                <a:spcPts val="0"/>
-              </a:spcAft>
-              <a:buClr>
-                <a:srgbClr val="051830"/>
-              </a:buClr>
-              <a:buSzPts val="3000"/>
-              <a:buFont typeface="Calibri"/>
-              <a:buNone/>
-            </a:pPr>
-            <a:r>
-              <a:rPr lang="en-US" sz="3000" b="0" i="0" u="none" strike="noStrike" cap="none">
-                <a:solidFill>
-                  <a:srgbClr val="051830"/>
-                </a:solidFill>
-                <a:latin typeface="Calibri"/>
-                <a:ea typeface="Calibri"/>
-                <a:cs typeface="Calibri"/>
-                <a:sym typeface="Calibri"/>
-              </a:rPr>
-              <a:t>Trap to CPU Capability</a:t>
-            </a:r>
-            <a:endParaRPr sz="3000" b="0" i="0" u="none" strike="noStrike" cap="none">
-              <a:solidFill>
-                <a:schemeClr val="dk1"/>
-              </a:solidFill>
-              <a:latin typeface="Calibri"/>
-              <a:ea typeface="Calibri"/>
-              <a:cs typeface="Calibri"/>
-              <a:sym typeface="Calibri"/>
-            </a:endParaRPr>
-          </a:p>
-        </p:txBody>
-      </p:sp>
-      <p:sp>
-        <p:nvSpPr>
-          <p:cNvPr id="164" name="Google Shape;164;g38b39bbdc2a_0_79"/>
-          <p:cNvSpPr/>
-          <p:nvPr/>
-        </p:nvSpPr>
-        <p:spPr>
-          <a:xfrm>
-            <a:off x="0" y="4850892"/>
-            <a:ext cx="9144000" cy="18300"/>
-          </a:xfrm>
-          <a:prstGeom prst="rect">
-            <a:avLst/>
-          </a:prstGeom>
-          <a:solidFill>
-            <a:srgbClr val="C8A85A"/>
-          </a:solidFill>
-          <a:ln w="12700" cap="flat" cmpd="sng">
-            <a:solidFill>
-              <a:srgbClr val="C8A85A"/>
-            </a:solidFill>
-            <a:prstDash val="solid"/>
-            <a:round/>
-            <a:headEnd type="none" w="sm" len="sm"/>
-            <a:tailEnd type="none" w="sm" len="sm"/>
-          </a:ln>
-        </p:spPr>
-        <p:txBody>
-          <a:bodyPr spcFirstLastPara="1" wrap="square" lIns="91425" tIns="91425" rIns="91425" bIns="91425" anchor="ctr" anchorCtr="0">
-            <a:noAutofit/>
-          </a:bodyPr>
-          <a:lstStyle/>
-          <a:p>
-            <a:pPr marL="0" marR="0" lvl="0" indent="0" algn="l" rtl="0">
-              <a:lnSpc>
-                <a:spcPct val="100000"/>
-              </a:lnSpc>
-              <a:spcBef>
-                <a:spcPts val="0"/>
-              </a:spcBef>
-              <a:spcAft>
-                <a:spcPts val="0"/>
-              </a:spcAft>
-              <a:buClr>
-                <a:srgbClr val="000000"/>
-              </a:buClr>
-              <a:buSzPts val="1400"/>
-              <a:buFont typeface="Arial"/>
-              <a:buNone/>
-            </a:pPr>
-            <a:endParaRPr sz="1400" b="0" i="0" u="none" strike="noStrike" cap="none">
-              <a:solidFill>
-                <a:srgbClr val="000000"/>
-              </a:solidFill>
-              <a:latin typeface="Arial"/>
-              <a:ea typeface="Arial"/>
-              <a:cs typeface="Arial"/>
-              <a:sym typeface="Arial"/>
-            </a:endParaRPr>
-          </a:p>
-        </p:txBody>
-      </p:sp>
-      <p:sp>
-        <p:nvSpPr>
-          <p:cNvPr id="165" name="Google Shape;165;g38b39bbdc2a_0_79"/>
-          <p:cNvSpPr/>
-          <p:nvPr/>
-        </p:nvSpPr>
-        <p:spPr>
-          <a:xfrm>
-            <a:off x="0" y="4869180"/>
-            <a:ext cx="9144000" cy="274200"/>
-          </a:xfrm>
-          <a:prstGeom prst="rect">
-            <a:avLst/>
-          </a:prstGeom>
-          <a:solidFill>
-            <a:srgbClr val="F4F6FA"/>
-          </a:solidFill>
-          <a:ln w="12700" cap="flat" cmpd="sng">
-            <a:solidFill>
-              <a:srgbClr val="F4F6FA"/>
-            </a:solidFill>
-            <a:prstDash val="solid"/>
-            <a:round/>
-            <a:headEnd type="none" w="sm" len="sm"/>
-            <a:tailEnd type="none" w="sm" len="sm"/>
-          </a:ln>
-        </p:spPr>
-        <p:txBody>
-          <a:bodyPr spcFirstLastPara="1" wrap="square" lIns="91425" tIns="91425" rIns="91425" bIns="91425" anchor="ctr" anchorCtr="0">
-            <a:noAutofit/>
-          </a:bodyPr>
-          <a:lstStyle/>
-          <a:p>
-            <a:pPr marL="0" marR="0" lvl="0" indent="0" algn="l" rtl="0">
-              <a:lnSpc>
-                <a:spcPct val="100000"/>
-              </a:lnSpc>
-              <a:spcBef>
-                <a:spcPts val="0"/>
-              </a:spcBef>
-              <a:spcAft>
-                <a:spcPts val="0"/>
-              </a:spcAft>
-              <a:buClr>
-                <a:srgbClr val="000000"/>
-              </a:buClr>
-              <a:buSzPts val="1400"/>
-              <a:buFont typeface="Arial"/>
-              <a:buNone/>
-            </a:pPr>
-            <a:endParaRPr sz="1400" b="0" i="0" u="none" strike="noStrike" cap="none">
-              <a:solidFill>
-                <a:srgbClr val="000000"/>
-              </a:solidFill>
-              <a:latin typeface="Arial"/>
-              <a:ea typeface="Arial"/>
-              <a:cs typeface="Arial"/>
-              <a:sym typeface="Arial"/>
-            </a:endParaRPr>
-          </a:p>
-        </p:txBody>
-      </p:sp>
-      <p:sp>
-        <p:nvSpPr>
-          <p:cNvPr id="166" name="Google Shape;166;g38b39bbdc2a_0_79"/>
-          <p:cNvSpPr/>
-          <p:nvPr/>
-        </p:nvSpPr>
-        <p:spPr>
-          <a:xfrm>
-            <a:off x="274320" y="4887468"/>
-            <a:ext cx="7772400" cy="201300"/>
-          </a:xfrm>
-          <a:prstGeom prst="rect">
-            <a:avLst/>
-          </a:prstGeom>
-          <a:noFill/>
-          <a:ln>
-            <a:noFill/>
-          </a:ln>
-        </p:spPr>
-        <p:txBody>
-          <a:bodyPr spcFirstLastPara="1" wrap="square" lIns="91425" tIns="45700" rIns="91425" bIns="45700" anchor="ctr" anchorCtr="0">
-            <a:noAutofit/>
-          </a:bodyPr>
-          <a:lstStyle/>
-          <a:p>
-            <a:pPr marL="0" marR="0" lvl="0" indent="0" algn="ctr" rtl="0">
-              <a:lnSpc>
-                <a:spcPct val="100000"/>
-              </a:lnSpc>
-              <a:spcBef>
-                <a:spcPts val="0"/>
-              </a:spcBef>
-              <a:spcAft>
-                <a:spcPts val="0"/>
-              </a:spcAft>
-              <a:buClr>
-                <a:srgbClr val="888888"/>
-              </a:buClr>
-              <a:buSzPts val="700"/>
-              <a:buFont typeface="Calibri"/>
-              <a:buNone/>
-            </a:pPr>
-            <a:r>
-              <a:rPr lang="en-US" sz="700" b="0" i="0" u="none" strike="noStrike" cap="none">
-                <a:solidFill>
-                  <a:srgbClr val="888888"/>
-                </a:solidFill>
-                <a:latin typeface="Calibri"/>
-                <a:ea typeface="Calibri"/>
-                <a:cs typeface="Calibri"/>
-                <a:sym typeface="Calibri"/>
-              </a:rPr>
-              <a:t>© 2026 Upscale AI – Proprietary and Confidential – Do Not Reproduce or Duplicate</a:t>
-            </a:r>
-            <a:endParaRPr sz="700" b="0" i="0" u="none" strike="noStrike" cap="none">
-              <a:solidFill>
-                <a:schemeClr val="dk1"/>
-              </a:solidFill>
-              <a:latin typeface="Calibri"/>
-              <a:ea typeface="Calibri"/>
-              <a:cs typeface="Calibri"/>
-              <a:sym typeface="Calibri"/>
-            </a:endParaRPr>
-          </a:p>
-        </p:txBody>
-      </p:sp>
-      <p:sp>
-        <p:nvSpPr>
-          <p:cNvPr id="167" name="Google Shape;167;g38b39bbdc2a_0_79"/>
-          <p:cNvSpPr/>
-          <p:nvPr/>
-        </p:nvSpPr>
-        <p:spPr>
-          <a:xfrm>
-            <a:off x="7863840" y="4887468"/>
-            <a:ext cx="1097400" cy="201300"/>
-          </a:xfrm>
-          <a:prstGeom prst="rect">
-            <a:avLst/>
-          </a:prstGeom>
-          <a:noFill/>
-          <a:ln>
-            <a:noFill/>
-          </a:ln>
-        </p:spPr>
-        <p:txBody>
-          <a:bodyPr spcFirstLastPara="1" wrap="square" lIns="91425" tIns="45700" rIns="91425" bIns="45700" anchor="ctr" anchorCtr="0">
-            <a:noAutofit/>
-          </a:bodyPr>
-          <a:lstStyle/>
-          <a:p>
-            <a:pPr marL="0" marR="0" lvl="0" indent="0" algn="r" rtl="0">
-              <a:lnSpc>
-                <a:spcPct val="100000"/>
-              </a:lnSpc>
-              <a:spcBef>
-                <a:spcPts val="0"/>
-              </a:spcBef>
-              <a:spcAft>
-                <a:spcPts val="0"/>
-              </a:spcAft>
-              <a:buClr>
-                <a:srgbClr val="FFE19E"/>
-              </a:buClr>
-              <a:buSzPts val="800"/>
-              <a:buFont typeface="Calibri"/>
-              <a:buNone/>
-            </a:pPr>
-            <a:r>
-              <a:rPr lang="en-US" sz="800" b="1" i="0" u="none" strike="noStrike" cap="none">
-                <a:solidFill>
-                  <a:srgbClr val="FFE19E"/>
-                </a:solidFill>
-                <a:latin typeface="Calibri"/>
-                <a:ea typeface="Calibri"/>
-                <a:cs typeface="Calibri"/>
-                <a:sym typeface="Calibri"/>
-              </a:rPr>
-              <a:t>UP </a:t>
-            </a:r>
-            <a:r>
-              <a:rPr lang="en-US" sz="900" b="1" i="0" u="none" strike="noStrike" cap="none">
-                <a:solidFill>
-                  <a:srgbClr val="333333"/>
-                </a:solidFill>
-                <a:latin typeface="Calibri"/>
-                <a:ea typeface="Calibri"/>
-                <a:cs typeface="Calibri"/>
-                <a:sym typeface="Calibri"/>
-              </a:rPr>
-              <a:t>upscale </a:t>
-            </a:r>
-            <a:r>
-              <a:rPr lang="en-US" sz="900" b="0" i="0" u="none" strike="noStrike" cap="none">
-                <a:solidFill>
-                  <a:srgbClr val="4F81BD"/>
-                </a:solidFill>
-                <a:latin typeface="Calibri"/>
-                <a:ea typeface="Calibri"/>
-                <a:cs typeface="Calibri"/>
-                <a:sym typeface="Calibri"/>
-              </a:rPr>
-              <a:t>ai</a:t>
-            </a:r>
-            <a:endParaRPr sz="800" b="0" i="0" u="none" strike="noStrike" cap="none">
-              <a:solidFill>
-                <a:schemeClr val="dk1"/>
-              </a:solidFill>
-              <a:latin typeface="Calibri"/>
-              <a:ea typeface="Calibri"/>
-              <a:cs typeface="Calibri"/>
-              <a:sym typeface="Calibri"/>
-            </a:endParaRPr>
-          </a:p>
-        </p:txBody>
-      </p:sp>
-      <p:sp>
-        <p:nvSpPr>
-          <p:cNvPr id="168" name="Google Shape;168;g38b39bbdc2a_0_79"/>
-          <p:cNvSpPr txBox="1"/>
-          <p:nvPr/>
-        </p:nvSpPr>
-        <p:spPr>
-          <a:xfrm>
-            <a:off x="411475" y="795525"/>
-            <a:ext cx="8321100" cy="3917400"/>
-          </a:xfrm>
-          <a:prstGeom prst="rect">
-            <a:avLst/>
-          </a:prstGeom>
-          <a:noFill/>
-          <a:ln>
-            <a:noFill/>
-          </a:ln>
-        </p:spPr>
-        <p:txBody>
-          <a:bodyPr spcFirstLastPara="1" wrap="square" lIns="91425" tIns="91425" rIns="91425" bIns="91425" anchor="t" anchorCtr="0">
-            <a:spAutoFit/>
-          </a:bodyPr>
-          <a:lstStyle/>
-          <a:p>
-            <a:pPr marL="457200" marR="0" lvl="0" indent="-307975" algn="l" rtl="0">
-              <a:lnSpc>
-                <a:spcPct val="115000"/>
-              </a:lnSpc>
-              <a:spcBef>
-                <a:spcPts val="1200"/>
-              </a:spcBef>
-              <a:spcAft>
-                <a:spcPts val="0"/>
-              </a:spcAft>
-              <a:buClr>
-                <a:schemeClr val="dk1"/>
-              </a:buClr>
-              <a:buSzPts val="1250"/>
-              <a:buFont typeface="Arial"/>
-              <a:buChar char="●"/>
-            </a:pPr>
-            <a:r>
-              <a:rPr lang="en-US" sz="1250" b="0" i="0" u="none" strike="noStrike" cap="none">
-                <a:solidFill>
-                  <a:schemeClr val="dk1"/>
-                </a:solidFill>
-                <a:latin typeface="Arial"/>
-                <a:ea typeface="Arial"/>
-                <a:cs typeface="Arial"/>
-                <a:sym typeface="Arial"/>
-              </a:rPr>
-              <a:t>The matched packet is not forwarded; the full original packet is delivered entirely to CPU with no truncation.</a:t>
-            </a:r>
-            <a:endParaRPr sz="1250" b="0" i="0" u="none" strike="noStrike" cap="none">
-              <a:solidFill>
-                <a:schemeClr val="dk1"/>
-              </a:solidFill>
-              <a:latin typeface="Arial"/>
-              <a:ea typeface="Arial"/>
-              <a:cs typeface="Arial"/>
-              <a:sym typeface="Arial"/>
-            </a:endParaRPr>
-          </a:p>
-          <a:p>
-            <a:pPr marL="457200" marR="0" lvl="0" indent="-307975" algn="l" rtl="0">
-              <a:lnSpc>
-                <a:spcPct val="115000"/>
-              </a:lnSpc>
-              <a:spcBef>
-                <a:spcPts val="0"/>
-              </a:spcBef>
-              <a:spcAft>
-                <a:spcPts val="0"/>
-              </a:spcAft>
-              <a:buClr>
-                <a:schemeClr val="dk1"/>
-              </a:buClr>
-              <a:buSzPts val="1250"/>
-              <a:buFont typeface="Arial"/>
-              <a:buChar char="●"/>
-            </a:pPr>
-            <a:r>
-              <a:rPr lang="en-US" sz="1250" b="0" i="0" u="none" strike="noStrike" cap="none">
-                <a:solidFill>
-                  <a:schemeClr val="dk1"/>
-                </a:solidFill>
-                <a:latin typeface="Arial"/>
-                <a:ea typeface="Arial"/>
-                <a:cs typeface="Arial"/>
-                <a:sym typeface="Arial"/>
-              </a:rPr>
-              <a:t>Any route prefix, MAC address, or neighbor entry can individually be designated to trap matching packets to CPU, each with its own source tag.</a:t>
-            </a:r>
-            <a:endParaRPr sz="1250" b="0" i="0" u="none" strike="noStrike" cap="none">
-              <a:solidFill>
-                <a:schemeClr val="dk1"/>
-              </a:solidFill>
-              <a:latin typeface="Arial"/>
-              <a:ea typeface="Arial"/>
-              <a:cs typeface="Arial"/>
-              <a:sym typeface="Arial"/>
-            </a:endParaRPr>
-          </a:p>
-          <a:p>
-            <a:pPr marL="457200" marR="0" lvl="0" indent="-307975" algn="l" rtl="0">
-              <a:lnSpc>
-                <a:spcPct val="115000"/>
-              </a:lnSpc>
-              <a:spcBef>
-                <a:spcPts val="0"/>
-              </a:spcBef>
-              <a:spcAft>
-                <a:spcPts val="0"/>
-              </a:spcAft>
-              <a:buClr>
-                <a:schemeClr val="dk1"/>
-              </a:buClr>
-              <a:buSzPts val="1250"/>
-              <a:buFont typeface="Arial"/>
-              <a:buChar char="●"/>
-            </a:pPr>
-            <a:r>
-              <a:rPr lang="en-US" sz="1250" b="0" i="0" u="none" strike="noStrike" cap="none">
-                <a:solidFill>
-                  <a:schemeClr val="dk1"/>
-                </a:solidFill>
-                <a:latin typeface="Arial"/>
-                <a:ea typeface="Arial"/>
-                <a:cs typeface="Arial"/>
-                <a:sym typeface="Arial"/>
-              </a:rPr>
-              <a:t>A group of routes sharing a common nexthop can all be trapped with a single designation; changing the group's trap setting takes effect for all routes in the group simultaneously.</a:t>
-            </a:r>
-            <a:endParaRPr sz="1250" b="0" i="0" u="none" strike="noStrike" cap="none">
-              <a:solidFill>
-                <a:schemeClr val="dk1"/>
-              </a:solidFill>
-              <a:latin typeface="Arial"/>
-              <a:ea typeface="Arial"/>
-              <a:cs typeface="Arial"/>
-              <a:sym typeface="Arial"/>
-            </a:endParaRPr>
-          </a:p>
-          <a:p>
-            <a:pPr marL="457200" marR="0" lvl="0" indent="-307975" algn="l" rtl="0">
-              <a:lnSpc>
-                <a:spcPct val="115000"/>
-              </a:lnSpc>
-              <a:spcBef>
-                <a:spcPts val="0"/>
-              </a:spcBef>
-              <a:spcAft>
-                <a:spcPts val="0"/>
-              </a:spcAft>
-              <a:buClr>
-                <a:schemeClr val="dk1"/>
-              </a:buClr>
-              <a:buSzPts val="1250"/>
-              <a:buFont typeface="Arial"/>
-              <a:buChar char="●"/>
-            </a:pPr>
-            <a:r>
-              <a:rPr lang="en-US" sz="1250" b="0" i="0" u="none" strike="noStrike" cap="none">
-                <a:solidFill>
-                  <a:schemeClr val="dk1"/>
-                </a:solidFill>
-                <a:latin typeface="Arial"/>
-                <a:ea typeface="Arial"/>
-                <a:cs typeface="Arial"/>
-                <a:sym typeface="Arial"/>
-              </a:rPr>
-              <a:t>An ACL rule can override the forwarding decision and redirect a matching packet to CPU, regardless of what the forwarding table resolves to.</a:t>
-            </a:r>
-            <a:endParaRPr sz="1250" b="0" i="0" u="none" strike="noStrike" cap="none">
-              <a:solidFill>
-                <a:schemeClr val="dk1"/>
-              </a:solidFill>
-              <a:latin typeface="Arial"/>
-              <a:ea typeface="Arial"/>
-              <a:cs typeface="Arial"/>
-              <a:sym typeface="Arial"/>
-            </a:endParaRPr>
-          </a:p>
-          <a:p>
-            <a:pPr marL="457200" marR="0" lvl="0" indent="-307975" algn="l" rtl="0">
-              <a:lnSpc>
-                <a:spcPct val="115000"/>
-              </a:lnSpc>
-              <a:spcBef>
-                <a:spcPts val="0"/>
-              </a:spcBef>
-              <a:spcAft>
-                <a:spcPts val="0"/>
-              </a:spcAft>
-              <a:buClr>
-                <a:schemeClr val="dk1"/>
-              </a:buClr>
-              <a:buSzPts val="1250"/>
-              <a:buFont typeface="Arial"/>
-              <a:buChar char="●"/>
-            </a:pPr>
-            <a:r>
-              <a:rPr lang="en-US" sz="1250" b="0" i="0" u="none" strike="noStrike" cap="none">
-                <a:solidFill>
-                  <a:schemeClr val="dk1"/>
-                </a:solidFill>
-                <a:latin typeface="Arial"/>
-                <a:ea typeface="Arial"/>
-                <a:cs typeface="Arial"/>
-                <a:sym typeface="Arial"/>
-              </a:rPr>
-              <a:t>Each trapped packet carries a 4-bit trap reason in the forwarding metadata delivered alongside the full original packet</a:t>
-            </a:r>
-            <a:endParaRPr sz="1250" b="0" i="0" u="none" strike="noStrike" cap="none">
-              <a:solidFill>
-                <a:schemeClr val="dk1"/>
-              </a:solidFill>
-              <a:latin typeface="Arial"/>
-              <a:ea typeface="Arial"/>
-              <a:cs typeface="Arial"/>
-              <a:sym typeface="Arial"/>
-            </a:endParaRPr>
-          </a:p>
-          <a:p>
-            <a:pPr marL="457200" marR="0" lvl="0" indent="-307975" algn="l" rtl="0">
-              <a:lnSpc>
-                <a:spcPct val="115000"/>
-              </a:lnSpc>
-              <a:spcBef>
-                <a:spcPts val="0"/>
-              </a:spcBef>
-              <a:spcAft>
-                <a:spcPts val="0"/>
-              </a:spcAft>
-              <a:buClr>
-                <a:schemeClr val="dk1"/>
-              </a:buClr>
-              <a:buSzPts val="1250"/>
-              <a:buFont typeface="Arial"/>
-              <a:buChar char="●"/>
-            </a:pPr>
-            <a:r>
-              <a:rPr lang="en-US" sz="1250" b="0" i="0" u="none" strike="noStrike" cap="none">
-                <a:solidFill>
-                  <a:schemeClr val="dk1"/>
-                </a:solidFill>
-                <a:latin typeface="Arial"/>
-                <a:ea typeface="Arial"/>
-                <a:cs typeface="Arial"/>
-                <a:sym typeface="Arial"/>
-              </a:rPr>
-              <a:t>Each trap reason is independently mapped to one of 4 CPU queue priorities, overriding any normal QoS classification for trapped packets.</a:t>
-            </a:r>
-            <a:endParaRPr sz="1250" b="0" i="0" u="none" strike="noStrike" cap="none">
-              <a:solidFill>
-                <a:schemeClr val="dk1"/>
-              </a:solidFill>
-              <a:latin typeface="Arial"/>
-              <a:ea typeface="Arial"/>
-              <a:cs typeface="Arial"/>
-              <a:sym typeface="Arial"/>
-            </a:endParaRPr>
-          </a:p>
-          <a:p>
-            <a:pPr marL="457200" marR="0" lvl="0" indent="-307975" algn="l" rtl="0">
-              <a:lnSpc>
-                <a:spcPct val="115000"/>
-              </a:lnSpc>
-              <a:spcBef>
-                <a:spcPts val="0"/>
-              </a:spcBef>
-              <a:spcAft>
-                <a:spcPts val="0"/>
-              </a:spcAft>
-              <a:buClr>
-                <a:schemeClr val="dk1"/>
-              </a:buClr>
-              <a:buSzPts val="1250"/>
-              <a:buFont typeface="Arial"/>
-              <a:buChar char="●"/>
-            </a:pPr>
-            <a:r>
-              <a:rPr lang="en-US" sz="1250" b="0" i="0" u="none" strike="noStrike" cap="none">
-                <a:solidFill>
-                  <a:schemeClr val="dk1"/>
-                </a:solidFill>
-                <a:latin typeface="Arial"/>
-                <a:ea typeface="Arial"/>
-                <a:cs typeface="Arial"/>
-                <a:sym typeface="Arial"/>
-              </a:rPr>
-              <a:t>Trap uses dedicated CPU queues (OQ 0–3), completely separate from copy to CPU queues (OQ 4–7).</a:t>
-            </a:r>
-            <a:endParaRPr sz="1250" b="0" i="0" u="none" strike="noStrike" cap="none">
-              <a:solidFill>
-                <a:schemeClr val="dk1"/>
-              </a:solidFill>
-              <a:latin typeface="Arial"/>
-              <a:ea typeface="Arial"/>
-              <a:cs typeface="Arial"/>
-              <a:sym typeface="Arial"/>
-            </a:endParaRPr>
-          </a:p>
-          <a:p>
-            <a:pPr marL="457200" marR="0" lvl="0" indent="-307975" algn="l" rtl="0">
-              <a:lnSpc>
-                <a:spcPct val="115000"/>
-              </a:lnSpc>
-              <a:spcBef>
-                <a:spcPts val="0"/>
-              </a:spcBef>
-              <a:spcAft>
-                <a:spcPts val="0"/>
-              </a:spcAft>
-              <a:buClr>
-                <a:schemeClr val="dk1"/>
-              </a:buClr>
-              <a:buSzPts val="1250"/>
-              <a:buFont typeface="Arial"/>
-              <a:buChar char="●"/>
-            </a:pPr>
-            <a:r>
-              <a:rPr lang="en-US" sz="1250" b="0" i="0" u="none" strike="noStrike" cap="none">
-                <a:solidFill>
-                  <a:schemeClr val="dk1"/>
-                </a:solidFill>
-                <a:latin typeface="Arial"/>
-                <a:ea typeface="Arial"/>
-                <a:cs typeface="Arial"/>
-                <a:sym typeface="Arial"/>
-              </a:rPr>
-              <a:t>Trap and copy to CPU are independent delivery paths; both can fire simultaneously for the same packet, producing two independent deliveries to the CPU.</a:t>
-            </a:r>
-            <a:endParaRPr sz="1250" b="0" i="0" u="none" strike="noStrike" cap="none">
-              <a:solidFill>
-                <a:schemeClr val="dk1"/>
-              </a:solidFill>
-              <a:latin typeface="Arial"/>
-              <a:ea typeface="Arial"/>
-              <a:cs typeface="Arial"/>
-              <a:sym typeface="Arial"/>
-            </a:endParaRPr>
-          </a:p>
-          <a:p>
-            <a:pPr marL="457200" marR="0" lvl="0" indent="-307975" algn="l" rtl="0">
-              <a:lnSpc>
-                <a:spcPct val="115000"/>
-              </a:lnSpc>
-              <a:spcBef>
-                <a:spcPts val="0"/>
-              </a:spcBef>
-              <a:spcAft>
-                <a:spcPts val="0"/>
-              </a:spcAft>
-              <a:buClr>
-                <a:schemeClr val="dk1"/>
-              </a:buClr>
-              <a:buSzPts val="1250"/>
-              <a:buFont typeface="Arial"/>
-              <a:buChar char="●"/>
-            </a:pPr>
-            <a:r>
-              <a:rPr lang="en-US" sz="1250" b="0" i="0" u="none" strike="noStrike" cap="none">
-                <a:solidFill>
-                  <a:schemeClr val="dk1"/>
-                </a:solidFill>
-                <a:latin typeface="Arial"/>
-                <a:ea typeface="Arial"/>
-                <a:cs typeface="Arial"/>
-                <a:sym typeface="Arial"/>
-              </a:rPr>
-              <a:t>Trapped packets can optionally carry a 32B ingress metadata header providing source port, ingress VLAN, and pipeline state to the CPU.</a:t>
-            </a:r>
-            <a:endParaRPr sz="1250" b="0" i="0" u="none" strike="noStrike" cap="none">
-              <a:solidFill>
-                <a:schemeClr val="dk1"/>
-              </a:solidFill>
-              <a:latin typeface="Arial"/>
-              <a:ea typeface="Arial"/>
-              <a:cs typeface="Arial"/>
-              <a:sym typeface="Arial"/>
-            </a:endParaRPr>
-          </a:p>
-          <a:p>
-            <a:pPr marL="457200" marR="0" lvl="0" indent="-307975" algn="l" rtl="0">
-              <a:lnSpc>
-                <a:spcPct val="115000"/>
-              </a:lnSpc>
-              <a:spcBef>
-                <a:spcPts val="0"/>
-              </a:spcBef>
-              <a:spcAft>
-                <a:spcPts val="0"/>
-              </a:spcAft>
-              <a:buClr>
-                <a:schemeClr val="dk1"/>
-              </a:buClr>
-              <a:buSzPts val="1250"/>
-              <a:buFont typeface="Arial"/>
-              <a:buChar char="●"/>
-            </a:pPr>
-            <a:r>
-              <a:rPr lang="en-US" sz="1250" b="0" i="0" u="none" strike="noStrike" cap="none">
-                <a:solidFill>
-                  <a:schemeClr val="dk1"/>
-                </a:solidFill>
-                <a:latin typeface="Arial"/>
-                <a:ea typeface="Arial"/>
-                <a:cs typeface="Arial"/>
-                <a:sym typeface="Arial"/>
-              </a:rPr>
-              <a:t>No rate limiting: every packet matching a trap designation is delivered unconditionally</a:t>
-            </a:r>
-            <a:endParaRPr sz="1250" b="0" i="0" u="none" strike="noStrike" cap="none">
-              <a:solidFill>
-                <a:schemeClr val="dk1"/>
-              </a:solidFill>
-              <a:latin typeface="Arial"/>
-              <a:ea typeface="Arial"/>
-              <a:cs typeface="Arial"/>
-              <a:sym typeface="Arial"/>
-            </a:endParaRPr>
           </a:p>
         </p:txBody>
       </p:sp>
@@ -8441,7 +7433,7 @@
               <a:buNone/>
             </a:pPr>
             <a:r>
-              <a:rPr lang="en-US" sz="3000" b="0" i="0" u="none" strike="noStrike" cap="none">
+              <a:rPr lang="en-US" sz="2600" b="0" i="0" u="none" strike="noStrike" cap="none">
                 <a:solidFill>
                   <a:srgbClr val="051830"/>
                 </a:solidFill>
@@ -8787,10 +7779,11 @@
               <a:buChar char="●"/>
             </a:pPr>
             <a:r>
-              <a:rPr>
+              <a:rPr sz="1300">
                 <a:solidFill>
                   <a:srgbClr val="333333"/>
                 </a:solidFill>
+                <a:latin typeface="Arial"/>
               </a:rPr>
               <a:t>Beat 1 · ~1 min</a:t>
             </a:r>
@@ -8810,10 +7803,11 @@
           <a:p>
             <a:pPr/>
             <a:r>
-              <a:rPr>
+              <a:rPr sz="1300">
                 <a:solidFill>
                   <a:srgbClr val="333333"/>
                 </a:solidFill>
+                <a:latin typeface="Arial"/>
               </a:rPr>
               <a:t>Assumption: situation and task on A3 slides 1–2 are aligned.</a:t>
             </a:r>
@@ -8821,10 +7815,11 @@
           <a:p>
             <a:pPr/>
             <a:r>
-              <a:rPr>
+              <a:rPr sz="1300">
                 <a:solidFill>
                   <a:srgbClr val="333333"/>
                 </a:solidFill>
+                <a:latin typeface="Arial"/>
               </a:rPr>
               <a:t>This walk: define the task — validation machine, owners, QoS wedge on pipeline — deferrals and Cx.</a:t>
             </a:r>
@@ -8832,10 +7827,11 @@
           <a:p>
             <a:pPr/>
             <a:r>
-              <a:rPr>
+              <a:rPr sz="1300">
                 <a:solidFill>
                   <a:srgbClr val="333333"/>
                 </a:solidFill>
+                <a:latin typeface="Arial"/>
               </a:rPr>
               <a:t>After walk: A3 slides 3–4 — result and sponsorship (not repeated here).</a:t>
             </a:r>
@@ -8918,7 +7914,7 @@
               <a:buNone/>
             </a:pPr>
             <a:r>
-              <a:rPr lang="en-US" sz="3000" b="0" i="0" u="none" strike="noStrike" cap="none">
+              <a:rPr lang="en-US" sz="2600" b="0" i="0" u="none" strike="noStrike" cap="none">
                 <a:solidFill>
                   <a:srgbClr val="051830"/>
                 </a:solidFill>
@@ -9264,10 +8260,11 @@
               <a:buChar char="●"/>
             </a:pPr>
             <a:r>
-              <a:rPr>
+              <a:rPr sz="1300">
                 <a:solidFill>
                   <a:srgbClr val="333333"/>
                 </a:solidFill>
+                <a:latin typeface="Arial"/>
               </a:rPr>
               <a:t>Beat 2 · thin</a:t>
             </a:r>
@@ -9287,10 +8284,11 @@
           <a:p>
             <a:pPr/>
             <a:r>
-              <a:rPr>
+              <a:rPr sz="1300">
                 <a:solidFill>
                   <a:srgbClr val="333333"/>
                 </a:solidFill>
+                <a:latin typeface="Arial"/>
               </a:rPr>
               <a:t>Thu: A3 slides 1–2, then this deck (~6 beats).</a:t>
             </a:r>
@@ -9298,10 +8296,11 @@
           <a:p>
             <a:pPr/>
             <a:r>
-              <a:rPr>
+              <a:rPr sz="1300">
                 <a:solidFill>
                   <a:srgbClr val="333333"/>
                 </a:solidFill>
+                <a:latin typeface="Arial"/>
               </a:rPr>
               <a:t>Next: Cx 2-pager — decisions, gates, open issues (~2 weeks).</a:t>
             </a:r>
@@ -9309,10 +8308,11 @@
           <a:p>
             <a:pPr/>
             <a:r>
-              <a:rPr>
+              <a:rPr sz="1300">
                 <a:solidFill>
                   <a:srgbClr val="333333"/>
                 </a:solidFill>
+                <a:latin typeface="Arial"/>
               </a:rPr>
               <a:t>Not Thu: 50-page dump, full HW catalog.</a:t>
             </a:r>
@@ -9395,7 +8395,7 @@
               <a:buNone/>
             </a:pPr>
             <a:r>
-              <a:rPr lang="en-US" sz="3000" b="0" i="0" u="none" strike="noStrike" cap="none">
+              <a:rPr lang="en-US" sz="2600" b="0" i="0" u="none" strike="noStrike" cap="none">
                 <a:solidFill>
                   <a:srgbClr val="051830"/>
                 </a:solidFill>
@@ -9741,10 +8741,11 @@
               <a:buChar char="●"/>
             </a:pPr>
             <a:r>
-              <a:rPr>
+              <a:rPr sz="1300">
                 <a:solidFill>
                   <a:srgbClr val="333333"/>
                 </a:solidFill>
+                <a:latin typeface="Arial"/>
               </a:rPr>
               <a:t>Beat 2 · ~3 min</a:t>
             </a:r>
@@ -9764,10 +8765,11 @@
           <a:p>
             <a:pPr/>
             <a:r>
-              <a:rPr>
+              <a:rPr sz="1300">
                 <a:solidFill>
                   <a:srgbClr val="333333"/>
                 </a:solidFill>
+                <a:latin typeface="Arial"/>
               </a:rPr>
               <a:t>Product / customer use cases</a:t>
             </a:r>
@@ -9775,10 +8777,11 @@
           <a:p>
             <a:pPr/>
             <a:r>
-              <a:rPr>
+              <a:rPr sz="1300">
                 <a:solidFill>
                   <a:srgbClr val="333333"/>
                 </a:solidFill>
+                <a:latin typeface="Arial"/>
               </a:rPr>
               <a:t>Arch validation (AV) ↔ datapath arch</a:t>
             </a:r>
@@ -9786,10 +8789,11 @@
           <a:p>
             <a:pPr/>
             <a:r>
-              <a:rPr>
+              <a:rPr sz="1300">
                 <a:solidFill>
                   <a:srgbClr val="333333"/>
                 </a:solidFill>
+                <a:latin typeface="Arial"/>
               </a:rPr>
               <a:t>Mgmt plane — SONiC / FBOSS lands</a:t>
             </a:r>
@@ -9797,10 +8801,11 @@
           <a:p>
             <a:pPr/>
             <a:r>
-              <a:rPr>
+              <a:rPr sz="1300">
                 <a:solidFill>
                   <a:srgbClr val="333333"/>
                 </a:solidFill>
+                <a:latin typeface="Arial"/>
               </a:rPr>
               <a:t>SW validation: C-models → emulation / FPGA → silicon</a:t>
             </a:r>
@@ -9808,10 +8813,11 @@
           <a:p>
             <a:pPr/>
             <a:r>
-              <a:rPr>
+              <a:rPr sz="1300">
                 <a:solidFill>
                   <a:srgbClr val="333333"/>
                 </a:solidFill>
+                <a:latin typeface="Arial"/>
               </a:rPr>
               <a:t>SDK + SAI done with explicit gates before tape-out</a:t>
             </a:r>
@@ -9819,10 +8825,11 @@
           <a:p>
             <a:pPr/>
             <a:r>
-              <a:rPr>
+              <a:rPr sz="1300">
                 <a:solidFill>
                   <a:srgbClr val="333333"/>
                 </a:solidFill>
+                <a:latin typeface="Arial"/>
               </a:rPr>
               <a:t>I socialize v0 of done per gate for group review — not unilateral mandate.</a:t>
             </a:r>
@@ -9905,7 +8912,7 @@
               <a:buNone/>
             </a:pPr>
             <a:r>
-              <a:rPr lang="en-US" sz="3000" b="0" i="0" u="none" strike="noStrike" cap="none">
+              <a:rPr lang="en-US" sz="2600" b="0" i="0" u="none" strike="noStrike" cap="none">
                 <a:solidFill>
                   <a:srgbClr val="051830"/>
                 </a:solidFill>
@@ -10251,10 +9258,11 @@
               <a:buChar char="●"/>
             </a:pPr>
             <a:r>
-              <a:rPr>
+              <a:rPr sz="1300">
                 <a:solidFill>
                   <a:srgbClr val="333333"/>
                 </a:solidFill>
+                <a:latin typeface="Arial"/>
               </a:rPr>
               <a:t>Beat 3 · ~2 min</a:t>
             </a:r>
@@ -10274,10 +9282,11 @@
           <a:p>
             <a:pPr/>
             <a:r>
-              <a:rPr>
+              <a:rPr sz="1300">
                 <a:solidFill>
                   <a:srgbClr val="333333"/>
                 </a:solidFill>
+                <a:latin typeface="Arial"/>
               </a:rPr>
               <a:t>Sponsor (Gururaj): exec alignment — external narrative</a:t>
             </a:r>
@@ -10285,10 +9294,11 @@
           <a:p>
             <a:pPr/>
             <a:r>
-              <a:rPr>
+              <a:rPr sz="1300">
                 <a:solidFill>
                   <a:srgbClr val="333333"/>
                 </a:solidFill>
+                <a:latin typeface="Arial"/>
               </a:rPr>
               <a:t>Validation program + QoS RM: Diwakar Tundlam</a:t>
             </a:r>
@@ -10296,10 +9306,11 @@
           <a:p>
             <a:pPr/>
             <a:r>
-              <a:rPr>
+              <a:rPr sz="1300">
                 <a:solidFill>
                   <a:srgbClr val="333333"/>
                 </a:solidFill>
+                <a:latin typeface="Arial"/>
               </a:rPr>
               <a:t>L2/L3 / ACL: Shafi Mohammad · ECMP / AV: Tippanna Hongal</a:t>
             </a:r>
@@ -10307,10 +9318,11 @@
           <a:p>
             <a:pPr/>
             <a:r>
-              <a:rPr>
+              <a:rPr sz="1300">
                 <a:solidFill>
                   <a:srgbClr val="333333"/>
                 </a:solidFill>
+                <a:latin typeface="Arial"/>
               </a:rPr>
               <a:t>SDK / SAI: SDK leads — consult, not my R</a:t>
             </a:r>
@@ -10318,10 +9330,11 @@
           <a:p>
             <a:pPr/>
             <a:r>
-              <a:rPr>
+              <a:rPr sz="1300">
                 <a:solidFill>
                   <a:srgbClr val="333333"/>
                 </a:solidFill>
+                <a:latin typeface="Arial"/>
               </a:rPr>
               <a:t>Program mesh: Prasun Sinha · HW datapath / OCP: Rupa Budhia</a:t>
             </a:r>
@@ -10404,7 +9417,7 @@
               <a:buNone/>
             </a:pPr>
             <a:r>
-              <a:rPr lang="en-US" sz="3000" b="0" i="0" u="none" strike="noStrike" cap="none">
+              <a:rPr lang="en-US" sz="2600" b="0" i="0" u="none" strike="noStrike" cap="none">
                 <a:solidFill>
                   <a:srgbClr val="051830"/>
                 </a:solidFill>
@@ -10750,10 +9763,11 @@
               <a:buChar char="●"/>
             </a:pPr>
             <a:r>
-              <a:rPr>
+              <a:rPr sz="1300">
                 <a:solidFill>
                   <a:srgbClr val="333333"/>
                 </a:solidFill>
+                <a:latin typeface="Arial"/>
               </a:rPr>
               <a:t>Beat 4 · before pipeline</a:t>
             </a:r>
@@ -10773,10 +9787,11 @@
           <a:p>
             <a:pPr/>
             <a:r>
-              <a:rPr>
+              <a:rPr sz="1300">
                 <a:solidFill>
                   <a:srgbClr val="333333"/>
                 </a:solidFill>
+                <a:latin typeface="Arial"/>
               </a:rPr>
               <a:t>VLAN-PRI, TOS/DSCP → queues → schedulers</a:t>
             </a:r>
@@ -10784,10 +9799,11 @@
           <a:p>
             <a:pPr/>
             <a:r>
-              <a:rPr>
+              <a:rPr sz="1300">
                 <a:solidFill>
                   <a:srgbClr val="333333"/>
                 </a:solidFill>
+                <a:latin typeface="Arial"/>
               </a:rPr>
               <a:t>Buffer management and carving (resource manager)</a:t>
             </a:r>
@@ -10795,10 +9811,11 @@
           <a:p>
             <a:pPr/>
             <a:r>
-              <a:rPr>
+              <a:rPr sz="1300">
                 <a:solidFill>
                   <a:srgbClr val="333333"/>
                 </a:solidFill>
+                <a:latin typeface="Arial"/>
               </a:rPr>
               <a:t>Port speed + queue/port policy coherence</a:t>
             </a:r>
@@ -10806,10 +9823,11 @@
           <a:p>
             <a:pPr/>
             <a:r>
-              <a:rPr>
+              <a:rPr sz="1300">
                 <a:solidFill>
                   <a:srgbClr val="333333"/>
                 </a:solidFill>
+                <a:latin typeface="Arial"/>
               </a:rPr>
               <a:t>ESUN — align buffer/TM with standardization (OCP)</a:t>
             </a:r>
@@ -10817,10 +9835,11 @@
           <a:p>
             <a:pPr/>
             <a:r>
-              <a:rPr>
+              <a:rPr sz="1300">
                 <a:solidFill>
                   <a:srgbClr val="333333"/>
                 </a:solidFill>
+                <a:latin typeface="Arial"/>
               </a:rPr>
               <a:t>HWv1 now: no MPLS EXP, no IPv6 priority mapping yet · HWv2: EXP + IPv6 pri</a:t>
             </a:r>
@@ -10885,15 +9904,15 @@
           </a:bodyPr>
           <a:lstStyle/>
           <a:p>
-            <a:pPr marL="0" marR="0" lvl="0" indent="0" algn="l" rtl="0">
-              <a:lnSpc>
-                <a:spcPct val="100000"/>
-              </a:lnSpc>
-              <a:spcBef>
-                <a:spcPts val="0"/>
-              </a:spcBef>
-              <a:spcAft>
-                <a:spcPts val="0"/>
+            <a:pPr marL="0" marR="0" indent="0" algn="l" rtl="0">
+              <a:lnSpc>
+                <a:spcPct val="100000"/>
+              </a:lnSpc>
+              <a:spcBef>
+                <a:spcPts val="0"/>
+              </a:spcBef>
+              <a:spcAft>
+                <a:spcPts val="300"/>
               </a:spcAft>
               <a:buClr>
                 <a:srgbClr val="051830"/>
@@ -10903,14 +9922,11 @@
               <a:buNone/>
             </a:pPr>
             <a:r>
-              <a:rPr lang="en-US" sz="3000" b="0" i="0" u="none" strike="noStrike" cap="none">
+              <a:rPr sz="2600">
                 <a:solidFill>
                   <a:srgbClr val="051830"/>
                 </a:solidFill>
                 <a:latin typeface="Calibri"/>
-                <a:ea typeface="Calibri"/>
-                <a:cs typeface="Calibri"/>
-                <a:sym typeface="Calibri"/>
               </a:rPr>
               <a:t>Your pipeline slide — my wedge (center of walk)</a:t>
             </a:r>
@@ -11215,7 +10231,7 @@
         <p:spPr>
           <a:xfrm>
             <a:off x="411475" y="795525"/>
-            <a:ext cx="8321100" cy="3474900"/>
+            <a:ext cx="0" cy="0"/>
           </a:xfrm>
           <a:prstGeom prst="rect">
             <a:avLst/>
@@ -11231,7 +10247,7 @@
           </a:bodyPr>
           <a:lstStyle/>
           <a:p>
-            <a:pPr marL="457200" marR="0" indent="-307975" algn="l" rtl="0">
+            <a:pPr marL="457200" marR="0" lvl="0" indent="-307975" algn="l" rtl="0">
               <a:lnSpc>
                 <a:spcPct val="115000"/>
               </a:lnSpc>
@@ -11248,14 +10264,6 @@
               <a:buFont typeface="Arial"/>
               <a:buChar char="●"/>
             </a:pPr>
-            <a:r>
-              <a:rPr>
-                <a:solidFill>
-                  <a:srgbClr val="333333"/>
-                </a:solidFill>
-              </a:rPr>
-              <a:t>Beat 4 · QoSMAP + Queue/buffer carve (me) · Shafi (L2/ACL) · Tippanna (ECMP) · Rupa (parse/datapath)</a:t>
-            </a:r>
             <a:endParaRPr sz="1250" b="0" i="0" u="none" strike="noStrike" cap="none">
               <a:solidFill>
                 <a:schemeClr val="dk1"/>
@@ -11284,8 +10292,8 @@
         </p:blipFill>
         <p:spPr>
           <a:xfrm>
-            <a:off x="411480" y="1143000"/>
-            <a:ext cx="11155680" cy="6264176"/>
+            <a:off x="1030172" y="1920240"/>
+            <a:ext cx="7083656" cy="3977639"/>
           </a:xfrm>
           <a:prstGeom prst="rect">
             <a:avLst/>
@@ -11368,7 +10376,7 @@
               <a:buNone/>
             </a:pPr>
             <a:r>
-              <a:rPr lang="en-US" sz="3000" b="0" i="0" u="none" strike="noStrike" cap="none">
+              <a:rPr lang="en-US" sz="2600" b="0" i="0" u="none" strike="noStrike" cap="none">
                 <a:solidFill>
                   <a:srgbClr val="051830"/>
                 </a:solidFill>
@@ -11714,10 +10722,11 @@
               <a:buChar char="●"/>
             </a:pPr>
             <a:r>
-              <a:rPr>
+              <a:rPr sz="1300">
                 <a:solidFill>
                   <a:srgbClr val="556677"/>
                 </a:solidFill>
+                <a:latin typeface="Arial"/>
               </a:rPr>
               <a:t>Beat 4 · optional detail</a:t>
             </a:r>
@@ -11737,10 +10746,11 @@
           <a:p>
             <a:pPr/>
             <a:r>
-              <a:rPr>
+              <a:rPr sz="1300">
                 <a:solidFill>
                   <a:srgbClr val="333333"/>
                 </a:solidFill>
+                <a:latin typeface="Arial"/>
               </a:rPr>
               <a:t>Ingress / Parser — align parse correctness with Rupa before OCP/BCM calls</a:t>
             </a:r>
@@ -11748,10 +10758,11 @@
           <a:p>
             <a:pPr/>
             <a:r>
-              <a:rPr>
+              <a:rPr sz="1300">
                 <a:solidFill>
                   <a:srgbClr val="333333"/>
                 </a:solidFill>
+                <a:latin typeface="Arial"/>
               </a:rPr>
               <a:t>L2 — Shafi · Forward: ECMP (Tippanna), QoSMAP (me) · Egress Queue/carve (me)</a:t>
             </a:r>
@@ -11759,10 +10770,11 @@
           <a:p>
             <a:pPr/>
             <a:r>
-              <a:rPr>
+              <a:rPr sz="1300">
                 <a:solidFill>
                   <a:srgbClr val="333333"/>
                 </a:solidFill>
+                <a:latin typeface="Arial"/>
               </a:rPr>
               <a:t>Each block: AV done + SW proof (C-model → emulation) before silicon — I draft cross-block gates</a:t>
             </a:r>

--- a/dt100/manager-arch-vision-b6.pptx
+++ b/dt100/manager-arch-vision-b6.pptx
@@ -9899,7 +9899,7 @@
           </a:ln>
         </p:spPr>
         <p:txBody>
-          <a:bodyPr spcFirstLastPara="1" wrap="square" lIns="91425" tIns="45700" rIns="91425" bIns="45700" anchor="t" anchorCtr="0">
+          <a:bodyPr spcFirstLastPara="1" wrap="none" lIns="91425" tIns="45700" rIns="91425" bIns="45700" anchor="t" anchorCtr="0">
             <a:noAutofit/>
           </a:bodyPr>
           <a:lstStyle/>
@@ -10292,8 +10292,8 @@
         </p:blipFill>
         <p:spPr>
           <a:xfrm>
-            <a:off x="1030172" y="1920240"/>
-            <a:ext cx="7083656" cy="3977639"/>
+            <a:off x="1681542" y="1508760"/>
+            <a:ext cx="5780916" cy="3246120"/>
           </a:xfrm>
           <a:prstGeom prst="rect">
             <a:avLst/>

--- a/dt100/manager-arch-vision-b6.pptx
+++ b/dt100/manager-arch-vision-b6.pptx
@@ -4693,7 +4693,7 @@
                 <a:cs typeface="Calibri"/>
                 <a:sym typeface="Calibri"/>
               </a:rPr>
-              <a:t>Open after Yes on A3</a:t>
+              <a:t>Open after Yes on A3 — role-play, not a handoff</a:t>
             </a:r>
             <a:endParaRPr sz="1100" b="0" i="0" u="none" strike="noStrike" cap="none">
               <a:solidFill>
@@ -5608,7 +5608,7 @@
                 </a:solidFill>
                 <a:latin typeface="Calibri"/>
               </a:rPr>
-              <a:t>Walk: machine → owners → pipeline → defer → Cx</a:t>
+              <a:t>Walk: vision → draft plan → owners → pipeline</a:t>
             </a:r>
             <a:endParaRPr sz="2200" b="0" i="0" u="none" strike="noStrike" cap="none">
               <a:solidFill>
@@ -6468,7 +6468,7 @@
                 <a:cs typeface="Calibri"/>
                 <a:sym typeface="Calibri"/>
               </a:rPr>
-              <a:t>~2 weeks — Cx 2-pager</a:t>
+              <a:t>If you want me to drive — next beats</a:t>
             </a:r>
             <a:endParaRPr sz="3000" b="0" i="0" u="none" strike="noStrike" cap="none">
               <a:solidFill>
@@ -6811,7 +6811,7 @@
                 </a:solidFill>
                 <a:latin typeface="Arial"/>
               </a:rPr>
-              <a:t>Beat 6</a:t>
+              <a:t>Beat 6 · not committed Thu</a:t>
             </a:r>
             <a:endParaRPr sz="1250" b="0" i="0" u="none" strike="noStrike" cap="none">
               <a:solidFill>
@@ -6835,7 +6835,7 @@
                 </a:solidFill>
                 <a:latin typeface="Arial"/>
               </a:rPr>
-              <a:t>Decision: validation gate definitions (C-model / emu / pre-tapeout) v0</a:t>
+              <a:t>Expand B6: swimlanes, DRI depth, integrated AV / C-model / datapath / SDK / SAI validation</a:t>
             </a:r>
           </a:p>
           <a:p>
@@ -6847,7 +6847,7 @@
                 </a:solidFill>
                 <a:latin typeface="Arial"/>
               </a:rPr>
-              <a:t>Decision: QoS RM HWv1 scope sign-off with HW datapath DRI</a:t>
+              <a:t>QoS RM HWv1 scope with HW datapath DRI (Rupa lane) — gates as we agree</a:t>
             </a:r>
           </a:p>
           <a:p>
@@ -6859,7 +6859,7 @@
                 </a:solidFill>
                 <a:latin typeface="Arial"/>
               </a:rPr>
-              <a:t>Open: access to models, lab, repos · Actions: cadence with Shafi, Tippanna, Rupa, Prasun</a:t>
+              <a:t>Cadence: Shafi, Tippanna, Rupa, Prasun — only if Sponsor redirects execution to me</a:t>
             </a:r>
           </a:p>
           <a:p>
@@ -6871,7 +6871,7 @@
                 </a:solidFill>
                 <a:latin typeface="Arial"/>
               </a:rPr>
-              <a:t>If asked who must be in the room — offer here (not on A3)</a:t>
+              <a:t>Who must be in the room — offer here if you ask (not on A3)</a:t>
             </a:r>
           </a:p>
         </p:txBody>
@@ -7821,7 +7821,7 @@
                 </a:solidFill>
                 <a:latin typeface="Arial"/>
               </a:rPr>
-              <a:t>This walk: define the task — validation machine, owners, QoS wedge on pipeline — deferrals and Cx.</a:t>
+              <a:t>This walk: show vision and draft plan — validation machine, owners, QoS wedge on pipeline; co-evolve execution live (I am the deliverable, not a PDF).</a:t>
             </a:r>
           </a:p>
           <a:p>
@@ -7833,7 +7833,7 @@
                 </a:solidFill>
                 <a:latin typeface="Arial"/>
               </a:rPr>
-              <a:t>After walk: A3 slides 3–4 — result and sponsorship (not repeated here).</a:t>
+              <a:t>After walk: A3 slides 3–4 — mandate and sponsor trust (not repeated here).</a:t>
             </a:r>
           </a:p>
         </p:txBody>
@@ -8302,7 +8302,7 @@
                 </a:solidFill>
                 <a:latin typeface="Arial"/>
               </a:rPr>
-              <a:t>Next: Cx 2-pager — decisions, gates, open issues (~2 weeks).</a:t>
+              <a:t>Next: only if Sponsor directs — expand B6, swimlanes, integrated validation plans (depth and format your steer).</a:t>
             </a:r>
           </a:p>
           <a:p>

--- a/dt100/manager-arch-vision-b6.pptx
+++ b/dt100/manager-arch-vision-b6.pptx
@@ -6344,6 +6344,18 @@
           </a:p>
           <a:p>
             <a:pPr/>
+            <a:r>
+              <a:rPr sz="1300">
+                <a:solidFill>
+                  <a:srgbClr val="333333"/>
+                </a:solidFill>
+                <a:latin typeface="Arial"/>
+              </a:rPr>
+              <a:t>Explicitly out of Thu — weekly sync, not merged plans.</a:t>
+            </a:r>
+          </a:p>
+          <a:p>
+            <a:pPr/>
           </a:p>
           <a:p>
             <a:pPr/>
@@ -6354,7 +6366,7 @@
                 </a:solidFill>
                 <a:latin typeface="Arial"/>
               </a:rPr>
-              <a:t>Rupa SDK/SAI/datapath layout — related, different plan; weekly sync, not on Thu</a:t>
+              <a:t>Rupa SDK/SAI/datapath layout — related, different plan; weekly sync</a:t>
             </a:r>
           </a:p>
           <a:p>
@@ -6366,7 +6378,7 @@
                 </a:solidFill>
                 <a:latin typeface="Arial"/>
               </a:rPr>
-              <a:t>OCP ESUN: coordinate with Rupa before vendor calls; company position through Sponsor</a:t>
+              <a:t>OCP ESUN: coordinate with Rupa before vendor calls; company position through Gururaj</a:t>
             </a:r>
           </a:p>
           <a:p>
@@ -6825,6 +6837,18 @@
           </a:p>
           <a:p>
             <a:pPr/>
+            <a:r>
+              <a:rPr sz="1300">
+                <a:solidFill>
+                  <a:srgbClr val="333333"/>
+                </a:solidFill>
+                <a:latin typeface="Arial"/>
+              </a:rPr>
+              <a:t>Offer only if asked — who must be in the room.</a:t>
+            </a:r>
+          </a:p>
+          <a:p>
+            <a:pPr/>
           </a:p>
           <a:p>
             <a:pPr/>
@@ -6859,7 +6883,7 @@
                 </a:solidFill>
                 <a:latin typeface="Arial"/>
               </a:rPr>
-              <a:t>Cadence: Shafi, Tippanna, Rupa, Prasun — only if Sponsor redirects execution to me</a:t>
+              <a:t>Cadence: Shafi, Tippanna, Rupa, Prasun — if Gururaj redirects drive to me</a:t>
             </a:r>
           </a:p>
           <a:p>
@@ -6871,7 +6895,7 @@
                 </a:solidFill>
                 <a:latin typeface="Arial"/>
               </a:rPr>
-              <a:t>Who must be in the room — offer here if you ask (not on A3)</a:t>
+              <a:t>Room list — offer here if you ask (not on A3)</a:t>
             </a:r>
           </a:p>
         </p:txBody>
@@ -7318,6 +7342,18 @@
           </a:p>
           <a:p>
             <a:pPr/>
+            <a:r>
+              <a:rPr sz="1300">
+                <a:solidFill>
+                  <a:srgbClr val="333333"/>
+                </a:solidFill>
+                <a:latin typeface="Arial"/>
+              </a:rPr>
+              <a:t>Boundaries — keeps Thu walkable.</a:t>
+            </a:r>
+          </a:p>
+          <a:p>
+            <a:pPr/>
           </a:p>
           <a:p>
             <a:pPr/>
@@ -7799,6 +7835,18 @@
           </a:p>
           <a:p>
             <a:pPr/>
+            <a:r>
+              <a:rPr sz="1300">
+                <a:solidFill>
+                  <a:srgbClr val="333333"/>
+                </a:solidFill>
+                <a:latin typeface="Arial"/>
+              </a:rPr>
+              <a:t>Transition — A3 framed situation + task; this walk defines how.</a:t>
+            </a:r>
+          </a:p>
+          <a:p>
+            <a:pPr/>
           </a:p>
           <a:p>
             <a:pPr/>
@@ -7809,7 +7857,7 @@
                 </a:solidFill>
                 <a:latin typeface="Arial"/>
               </a:rPr>
-              <a:t>Assumption: situation and task on A3 slides 1–2 are aligned.</a:t>
+              <a:t>Assumption: A3 slides 1–2 aligned on program bar + QoS RM wedge.</a:t>
             </a:r>
           </a:p>
           <a:p>
@@ -7821,7 +7869,7 @@
                 </a:solidFill>
                 <a:latin typeface="Arial"/>
               </a:rPr>
-              <a:t>This walk: show vision and draft plan — validation machine, owners, QoS wedge on pipeline; co-evolve execution live (I am the deliverable, not a PDF).</a:t>
+              <a:t>Show validation machine, owners, QoS on logical pipeline — co-evolve plan live.</a:t>
             </a:r>
           </a:p>
           <a:p>
@@ -7833,7 +7881,7 @@
                 </a:solidFill>
                 <a:latin typeface="Arial"/>
               </a:rPr>
-              <a:t>After walk: A3 slides 3–4 — mandate and sponsor trust (not repeated here).</a:t>
+              <a:t>Close on A3 slides 3–4 (sprint scope + alignment) — not repeated here.</a:t>
             </a:r>
           </a:p>
         </p:txBody>
@@ -8280,6 +8328,18 @@
           </a:p>
           <a:p>
             <a:pPr/>
+            <a:r>
+              <a:rPr sz="1300">
+                <a:solidFill>
+                  <a:srgbClr val="333333"/>
+                </a:solidFill>
+                <a:latin typeface="Arial"/>
+              </a:rPr>
+              <a:t>Thin walk today; depth only if Gururaj redirects.</a:t>
+            </a:r>
+          </a:p>
+          <a:p>
+            <a:pPr/>
           </a:p>
           <a:p>
             <a:pPr/>
@@ -8302,7 +8362,7 @@
                 </a:solidFill>
                 <a:latin typeface="Arial"/>
               </a:rPr>
-              <a:t>Next: only if Sponsor directs — expand B6, swimlanes, integrated validation plans (depth and format your steer).</a:t>
+              <a:t>Next: expand swimlanes / integrated validation plans — format and depth per your steer.</a:t>
             </a:r>
           </a:p>
           <a:p>
@@ -8761,6 +8821,18 @@
           </a:p>
           <a:p>
             <a:pPr/>
+            <a:r>
+              <a:rPr sz="1300">
+                <a:solidFill>
+                  <a:srgbClr val="333333"/>
+                </a:solidFill>
+                <a:latin typeface="Arial"/>
+              </a:rPr>
+              <a:t>Gates are v0 for group review — not unilateral.</a:t>
+            </a:r>
+          </a:p>
+          <a:p>
+            <a:pPr/>
           </a:p>
           <a:p>
             <a:pPr/>
@@ -8783,7 +8855,7 @@
                 </a:solidFill>
                 <a:latin typeface="Arial"/>
               </a:rPr>
-              <a:t>Arch validation (AV) ↔ datapath arch</a:t>
+              <a:t>Architecture validation (AV) ↔ datapath arch</a:t>
             </a:r>
           </a:p>
           <a:p>
@@ -8831,7 +8903,7 @@
                 </a:solidFill>
                 <a:latin typeface="Arial"/>
               </a:rPr>
-              <a:t>I socialize v0 of done per gate for group review — not unilateral mandate.</a:t>
+              <a:t>I socialize v0 “done” per gate; peers own slice proof.</a:t>
             </a:r>
           </a:p>
         </p:txBody>
@@ -9278,6 +9350,18 @@
           </a:p>
           <a:p>
             <a:pPr/>
+            <a:r>
+              <a:rPr sz="1300">
+                <a:solidFill>
+                  <a:srgbClr val="333333"/>
+                </a:solidFill>
+                <a:latin typeface="Arial"/>
+              </a:rPr>
+              <a:t>Name DRIs once; point at pipeline slide next.</a:t>
+            </a:r>
+          </a:p>
+          <a:p>
+            <a:pPr/>
           </a:p>
           <a:p>
             <a:pPr/>
@@ -9288,7 +9372,7 @@
                 </a:solidFill>
                 <a:latin typeface="Arial"/>
               </a:rPr>
-              <a:t>Sponsor (Gururaj): exec alignment — external narrative</a:t>
+              <a:t>Gururaj: scope · company / OCP external</a:t>
             </a:r>
           </a:p>
           <a:p>
@@ -9312,7 +9396,7 @@
                 </a:solidFill>
                 <a:latin typeface="Arial"/>
               </a:rPr>
-              <a:t>L2/L3 / ACL: Shafi Mohammad · ECMP / AV: Tippanna Hongal</a:t>
+              <a:t>L2/L3 / ACL: Shafi Mohammad · ECMP / LAG / Counters · AV: Tippanna Hongal</a:t>
             </a:r>
           </a:p>
           <a:p>
@@ -9783,6 +9867,18 @@
           </a:p>
           <a:p>
             <a:pPr/>
+            <a:r>
+              <a:rPr sz="1300">
+                <a:solidFill>
+                  <a:srgbClr val="333333"/>
+                </a:solidFill>
+                <a:latin typeface="Arial"/>
+              </a:rPr>
+              <a:t>DSCP/TOS → TC → queues → schedulers; carve at CSB.</a:t>
+            </a:r>
+          </a:p>
+          <a:p>
+            <a:pPr/>
           </a:p>
           <a:p>
             <a:pPr/>
@@ -9841,7 +9937,7 @@
                 </a:solidFill>
                 <a:latin typeface="Arial"/>
               </a:rPr>
-              <a:t>HWv1 now: no MPLS EXP, no IPv6 priority mapping yet · HWv2: EXP + IPv6 pri</a:t>
+              <a:t>HWv1: no MPLS EXP, no IPv6 priority mapping · HWv2: EXP + IPv6 pri</a:t>
             </a:r>
           </a:p>
         </p:txBody>
@@ -10742,6 +10838,18 @@
           </a:p>
           <a:p>
             <a:pPr/>
+            <a:r>
+              <a:rPr sz="1300">
+                <a:solidFill>
+                  <a:srgbClr val="333333"/>
+                </a:solidFill>
+                <a:latin typeface="Arial"/>
+              </a:rPr>
+              <a:t>Only if Gururaj asks — each block needs AV + SW proof before silicon.</a:t>
+            </a:r>
+          </a:p>
+          <a:p>
+            <a:pPr/>
           </a:p>
           <a:p>
             <a:pPr/>
@@ -10752,7 +10860,7 @@
                 </a:solidFill>
                 <a:latin typeface="Arial"/>
               </a:rPr>
-              <a:t>Ingress / Parser — align parse correctness with Rupa before OCP/BCM calls</a:t>
+              <a:t>Ingress / Parser — parse correctness with Rupa before OCP/BCM calls</a:t>
             </a:r>
           </a:p>
           <a:p>
@@ -10764,7 +10872,7 @@
                 </a:solidFill>
                 <a:latin typeface="Arial"/>
               </a:rPr>
-              <a:t>L2 — Shafi · Forward: ECMP (Tippanna), QoSMAP (me) · Egress Queue/carve (me)</a:t>
+              <a:t>L2 — Shafi · Forward: ECMP / LAG / Counters (Tippanna), QoSMAP (me) · Egress Queue/carve (me)</a:t>
             </a:r>
           </a:p>
           <a:p>
@@ -10776,7 +10884,7 @@
                 </a:solidFill>
                 <a:latin typeface="Arial"/>
               </a:rPr>
-              <a:t>Each block: AV done + SW proof (C-model → emulation) before silicon — I draft cross-block gates</a:t>
+              <a:t>I draft cross-block gates; block DRIs own slice proof (C-model → emulation)</a:t>
             </a:r>
           </a:p>
         </p:txBody>

--- a/dt100/manager-arch-vision-b6.pptx
+++ b/dt100/manager-arch-vision-b6.pptx
@@ -4587,7 +4587,7 @@
                 <a:cs typeface="Arial"/>
                 <a:sym typeface="Arial"/>
               </a:rPr>
-              <a:t>Arch vision plan (B6)</a:t>
+              <a:t>QoS buffer carving arch</a:t>
             </a:r>
             <a:endParaRPr sz="1950" b="0" i="1" u="none" strike="noStrike" cap="none">
               <a:solidFill>
@@ -4693,7 +4693,7 @@
                 <a:cs typeface="Calibri"/>
                 <a:sym typeface="Calibri"/>
               </a:rPr>
-              <a:t>Open after Yes on A3 — role-play, not a handoff</a:t>
+              <a:t>Open after aligned on draft QoS slides — role-play, not a handoff</a:t>
             </a:r>
             <a:endParaRPr sz="1100" b="0" i="0" u="none" strike="noStrike" cap="none">
               <a:solidFill>
@@ -6859,7 +6859,7 @@
                 </a:solidFill>
                 <a:latin typeface="Arial"/>
               </a:rPr>
-              <a:t>Expand B6: swimlanes, DRI depth, integrated AV / C-model / datapath / SDK / SAI validation</a:t>
+              <a:t>Expand QoS buffer carving arch: swimlanes, DRI depth, integrated AV / C-model / datapath / SDK / SAI validation</a:t>
             </a:r>
           </a:p>
           <a:p>
@@ -6895,7 +6895,7 @@
                 </a:solidFill>
                 <a:latin typeface="Arial"/>
               </a:rPr>
-              <a:t>Room list — offer here if you ask (not on A3)</a:t>
+              <a:t>Room list — offer here if you ask (not on draft QoS slides)</a:t>
             </a:r>
           </a:p>
         </p:txBody>
@@ -7478,7 +7478,7 @@
                 <a:cs typeface="Calibri"/>
                 <a:sym typeface="Calibri"/>
               </a:rPr>
-              <a:t>Define task — after A3 slides 1–2</a:t>
+              <a:t>Define task — after draft QoS slides</a:t>
             </a:r>
             <a:endParaRPr sz="3000" b="0" i="0" u="none" strike="noStrike" cap="none">
               <a:solidFill>
@@ -7842,7 +7842,7 @@
                 </a:solidFill>
                 <a:latin typeface="Arial"/>
               </a:rPr>
-              <a:t>Transition — A3 framed situation + task; this walk defines how.</a:t>
+              <a:t>Transition — draft QoS slides framed situation + task; this walk defines how.</a:t>
             </a:r>
           </a:p>
           <a:p>
@@ -7857,7 +7857,7 @@
                 </a:solidFill>
                 <a:latin typeface="Arial"/>
               </a:rPr>
-              <a:t>Assumption: A3 slides 1–2 aligned on program bar + QoS RM wedge.</a:t>
+              <a:t>Assumption: draft QoS slides aligned on program bar + QoS RM wedge.</a:t>
             </a:r>
           </a:p>
           <a:p>
@@ -7881,7 +7881,7 @@
                 </a:solidFill>
                 <a:latin typeface="Arial"/>
               </a:rPr>
-              <a:t>Close on A3 slides 3–4 (sprint scope + alignment) — not repeated here.</a:t>
+              <a:t>Close on draft QoS slides (near-term scope + alignment) — not repeated here.</a:t>
             </a:r>
           </a:p>
         </p:txBody>
@@ -8350,7 +8350,7 @@
                 </a:solidFill>
                 <a:latin typeface="Arial"/>
               </a:rPr>
-              <a:t>Thu: A3 slides 1–2, then this deck (~6 beats).</a:t>
+              <a:t>Thu: draft QoS slides, then this deck (~6 beats).</a:t>
             </a:r>
           </a:p>
           <a:p>
@@ -8855,7 +8855,7 @@
                 </a:solidFill>
                 <a:latin typeface="Arial"/>
               </a:rPr>
-              <a:t>Architecture validation (AV) ↔ datapath arch</a:t>
+              <a:t>AV ↔ datapath arch</a:t>
             </a:r>
           </a:p>
           <a:p>
@@ -8879,7 +8879,7 @@
                 </a:solidFill>
                 <a:latin typeface="Arial"/>
               </a:rPr>
-              <a:t>SW validation: C-models → emulation / FPGA → silicon</a:t>
+              <a:t>Software validation: C-models → emulation / FPGA → silicon</a:t>
             </a:r>
           </a:p>
           <a:p>
@@ -9853,7 +9853,7 @@
                 </a:solidFill>
                 <a:latin typeface="Arial"/>
               </a:rPr>
-              <a:t>Beat 4 · before pipeline</a:t>
+              <a:t>Beat 4 · reference only (historical)</a:t>
             </a:r>
             <a:endParaRPr sz="1250" b="0" i="0" u="none" strike="noStrike" cap="none">
               <a:solidFill>
@@ -9874,7 +9874,7 @@
                 </a:solidFill>
                 <a:latin typeface="Arial"/>
               </a:rPr>
-              <a:t>DSCP/TOS → TC → queues → schedulers; carve at CSB.</a:t>
+              <a:t>Kept for reference — validation scope lives on slide 3 framework.</a:t>
             </a:r>
           </a:p>
           <a:p>
@@ -10845,7 +10845,7 @@
                 </a:solidFill>
                 <a:latin typeface="Arial"/>
               </a:rPr>
-              <a:t>Only if Gururaj asks — each block needs AV + SW proof before silicon.</a:t>
+              <a:t>Only if Gururaj asks — each block needs AV + software proof before silicon.</a:t>
             </a:r>
           </a:p>
           <a:p>
